--- a/soulia/graphs/boxplot_aLat_score_fibrose.pptx
+++ b/soulia/graphs/boxplot_aLat_score_fibrose.pptx
@@ -7720,7 +7720,7 @@
           <p:spPr>
             <a:xfrm>
               <a:off x="7709012" y="3690482"/>
-              <a:ext cx="219455" cy="219455"/>
+              <a:ext cx="219455" cy="219456"/>
             </a:xfrm>
             <a:prstGeom prst="rect">
               <a:avLst/>
@@ -8082,7 +8082,7 @@
           <p:spPr>
             <a:xfrm>
               <a:off x="7709012" y="4129394"/>
-              <a:ext cx="219455" cy="219456"/>
+              <a:ext cx="219455" cy="219455"/>
             </a:xfrm>
             <a:prstGeom prst="rect">
               <a:avLst/>
@@ -8263,7 +8263,7 @@
           <p:spPr>
             <a:xfrm>
               <a:off x="7709012" y="4348850"/>
-              <a:ext cx="219455" cy="219455"/>
+              <a:ext cx="219455" cy="219456"/>
             </a:xfrm>
             <a:prstGeom prst="rect">
               <a:avLst/>

--- a/soulia/graphs/boxplot_aLat_score_fibrose.pptx
+++ b/soulia/graphs/boxplot_aLat_score_fibrose.pptx
@@ -7720,7 +7720,7 @@
           <p:spPr>
             <a:xfrm>
               <a:off x="7709012" y="3690482"/>
-              <a:ext cx="219455" cy="219456"/>
+              <a:ext cx="219455" cy="219455"/>
             </a:xfrm>
             <a:prstGeom prst="rect">
               <a:avLst/>
@@ -8082,7 +8082,7 @@
           <p:spPr>
             <a:xfrm>
               <a:off x="7709012" y="4129394"/>
-              <a:ext cx="219455" cy="219455"/>
+              <a:ext cx="219455" cy="219456"/>
             </a:xfrm>
             <a:prstGeom prst="rect">
               <a:avLst/>
@@ -8263,7 +8263,7 @@
           <p:spPr>
             <a:xfrm>
               <a:off x="7709012" y="4348850"/>
-              <a:ext cx="219455" cy="219456"/>
+              <a:ext cx="219455" cy="219455"/>
             </a:xfrm>
             <a:prstGeom prst="rect">
               <a:avLst/>
